--- a/Slides/TUI.pptx
+++ b/Slides/TUI.pptx
@@ -5,7 +5,7 @@
     <p:sldMasterId id="2147483660" r:id="rId1"/>
   </p:sldMasterIdLst>
   <p:notesMasterIdLst>
-    <p:notesMasterId r:id="rId11"/>
+    <p:notesMasterId r:id="rId13"/>
   </p:notesMasterIdLst>
   <p:sldIdLst>
     <p:sldId id="256" r:id="rId2"/>
@@ -16,7 +16,9 @@
     <p:sldId id="263" r:id="rId7"/>
     <p:sldId id="264" r:id="rId8"/>
     <p:sldId id="257" r:id="rId9"/>
-    <p:sldId id="258" r:id="rId10"/>
+    <p:sldId id="267" r:id="rId10"/>
+    <p:sldId id="258" r:id="rId11"/>
+    <p:sldId id="266" r:id="rId12"/>
   </p:sldIdLst>
   <p:sldSz cx="12192000" cy="6858000"/>
   <p:notesSz cx="6858000" cy="9144000"/>
@@ -2619,7 +2621,7 @@
           <a:p>
             <a:r>
               <a:rPr lang="en-US" sz="1600"/>
-              <a:t>9</a:t>
+              <a:t>11</a:t>
             </a:r>
             <a:endParaRPr lang="en-US" sz="1600" dirty="0"/>
           </a:p>
@@ -3090,6 +3092,445 @@
 </p:sld>
 </file>
 
+<file path=ppt/slides/slide10.xml><?xml version="1.0" encoding="utf-8"?>
+<p:sld xmlns:a="http://schemas.openxmlformats.org/drawingml/2006/main" xmlns:r="http://schemas.openxmlformats.org/officeDocument/2006/relationships" xmlns:p="http://schemas.openxmlformats.org/presentationml/2006/main">
+  <p:cSld>
+    <p:spTree>
+      <p:nvGrpSpPr>
+        <p:cNvPr id="1" name=""/>
+        <p:cNvGrpSpPr/>
+        <p:nvPr/>
+      </p:nvGrpSpPr>
+      <p:grpSpPr>
+        <a:xfrm>
+          <a:off x="0" y="0"/>
+          <a:ext cx="0" cy="0"/>
+          <a:chOff x="0" y="0"/>
+          <a:chExt cx="0" cy="0"/>
+        </a:xfrm>
+      </p:grpSpPr>
+      <p:sp>
+        <p:nvSpPr>
+          <p:cNvPr id="2" name="Title 1">
+            <a:extLst>
+              <a:ext uri="{FF2B5EF4-FFF2-40B4-BE49-F238E27FC236}">
+                <a16:creationId xmlns:a16="http://schemas.microsoft.com/office/drawing/2014/main" id="{18186E39-D31F-7B26-00DC-DD5446EFD4D8}"/>
+              </a:ext>
+            </a:extLst>
+          </p:cNvPr>
+          <p:cNvSpPr>
+            <a:spLocks noGrp="1"/>
+          </p:cNvSpPr>
+          <p:nvPr>
+            <p:ph type="title"/>
+          </p:nvPr>
+        </p:nvSpPr>
+        <p:spPr/>
+        <p:txBody>
+          <a:bodyPr>
+            <a:normAutofit fontScale="90000"/>
+          </a:bodyPr>
+          <a:lstStyle/>
+          <a:p>
+            <a:r>
+              <a:rPr lang="en-US" dirty="0" err="1"/>
+              <a:t>Howto</a:t>
+            </a:r>
+            <a:endParaRPr lang="en-US" dirty="0"/>
+          </a:p>
+        </p:txBody>
+      </p:sp>
+      <p:sp>
+        <p:nvSpPr>
+          <p:cNvPr id="3" name="Content Placeholder 2">
+            <a:extLst>
+              <a:ext uri="{FF2B5EF4-FFF2-40B4-BE49-F238E27FC236}">
+                <a16:creationId xmlns:a16="http://schemas.microsoft.com/office/drawing/2014/main" id="{BA912E92-7534-64D3-13C0-9B4B1038EF7A}"/>
+              </a:ext>
+            </a:extLst>
+          </p:cNvPr>
+          <p:cNvSpPr>
+            <a:spLocks noGrp="1"/>
+          </p:cNvSpPr>
+          <p:nvPr>
+            <p:ph idx="1"/>
+          </p:nvPr>
+        </p:nvSpPr>
+        <p:spPr/>
+        <p:txBody>
+          <a:bodyPr/>
+          <a:lstStyle/>
+          <a:p>
+            <a:r>
+              <a:rPr lang="en-US" dirty="0" err="1"/>
+              <a:t>npm</a:t>
+            </a:r>
+            <a:r>
+              <a:rPr lang="en-US" dirty="0"/>
+              <a:t> </a:t>
+            </a:r>
+            <a:r>
+              <a:rPr lang="en-US" dirty="0" err="1"/>
+              <a:t>init</a:t>
+            </a:r>
+            <a:r>
+              <a:rPr lang="en-US" dirty="0"/>
+              <a:t> –y</a:t>
+            </a:r>
+          </a:p>
+          <a:p>
+            <a:r>
+              <a:rPr lang="en-US" dirty="0" err="1"/>
+              <a:t>npm</a:t>
+            </a:r>
+            <a:r>
+              <a:rPr lang="en-US" dirty="0"/>
+              <a:t> install ink react</a:t>
+            </a:r>
+          </a:p>
+          <a:p>
+            <a:r>
+              <a:rPr lang="en-US" dirty="0" err="1"/>
+              <a:t>npm</a:t>
+            </a:r>
+            <a:r>
+              <a:rPr lang="en-US" dirty="0"/>
+              <a:t> install -D </a:t>
+            </a:r>
+            <a:r>
+              <a:rPr lang="en-US" dirty="0" err="1"/>
+              <a:t>tsx</a:t>
+            </a:r>
+            <a:endParaRPr lang="en-US" dirty="0"/>
+          </a:p>
+          <a:p>
+            <a:r>
+              <a:rPr lang="en-US" dirty="0" err="1"/>
+              <a:t>npx</a:t>
+            </a:r>
+            <a:r>
+              <a:rPr lang="en-US" dirty="0"/>
+              <a:t> </a:t>
+            </a:r>
+            <a:r>
+              <a:rPr lang="en-US" dirty="0" err="1"/>
+              <a:t>tsx</a:t>
+            </a:r>
+            <a:r>
+              <a:rPr lang="en-US" dirty="0"/>
+              <a:t> </a:t>
+            </a:r>
+            <a:r>
+              <a:rPr lang="en-US" dirty="0" err="1"/>
+              <a:t>colors.jsx</a:t>
+            </a:r>
+            <a:endParaRPr lang="en-US" dirty="0"/>
+          </a:p>
+          <a:p>
+            <a:endParaRPr lang="en-US" dirty="0"/>
+          </a:p>
+        </p:txBody>
+      </p:sp>
+      <p:sp>
+        <p:nvSpPr>
+          <p:cNvPr id="4" name="Date Placeholder 3">
+            <a:extLst>
+              <a:ext uri="{FF2B5EF4-FFF2-40B4-BE49-F238E27FC236}">
+                <a16:creationId xmlns:a16="http://schemas.microsoft.com/office/drawing/2014/main" id="{0E10CC22-5EB2-9E6C-EA7F-01E8DCB29781}"/>
+              </a:ext>
+            </a:extLst>
+          </p:cNvPr>
+          <p:cNvSpPr>
+            <a:spLocks noGrp="1"/>
+          </p:cNvSpPr>
+          <p:nvPr>
+            <p:ph type="dt" sz="half" idx="10"/>
+          </p:nvPr>
+        </p:nvSpPr>
+        <p:spPr/>
+        <p:txBody>
+          <a:bodyPr/>
+          <a:lstStyle/>
+          <a:p>
+            <a:fld id="{FA1778D9-0FEE-AE4E-9301-EC64BED65456}" type="datetime1">
+              <a:rPr lang="en-US" smtClean="0"/>
+              <a:t>10/27/26</a:t>
+            </a:fld>
+            <a:endParaRPr lang="en-US"/>
+          </a:p>
+        </p:txBody>
+      </p:sp>
+      <p:sp>
+        <p:nvSpPr>
+          <p:cNvPr id="5" name="Footer Placeholder 4">
+            <a:extLst>
+              <a:ext uri="{FF2B5EF4-FFF2-40B4-BE49-F238E27FC236}">
+                <a16:creationId xmlns:a16="http://schemas.microsoft.com/office/drawing/2014/main" id="{3585ADD9-FCE7-8B1A-2589-BE4412627193}"/>
+              </a:ext>
+            </a:extLst>
+          </p:cNvPr>
+          <p:cNvSpPr>
+            <a:spLocks noGrp="1"/>
+          </p:cNvSpPr>
+          <p:nvPr>
+            <p:ph type="ftr" sz="quarter" idx="11"/>
+          </p:nvPr>
+        </p:nvSpPr>
+        <p:spPr/>
+        <p:txBody>
+          <a:bodyPr/>
+          <a:lstStyle/>
+          <a:p>
+            <a:r>
+              <a:rPr lang="en-US"/>
+              <a:t>© Steve Beaty and others as cited</a:t>
+            </a:r>
+          </a:p>
+        </p:txBody>
+      </p:sp>
+      <p:sp>
+        <p:nvSpPr>
+          <p:cNvPr id="6" name="Slide Number Placeholder 5">
+            <a:extLst>
+              <a:ext uri="{FF2B5EF4-FFF2-40B4-BE49-F238E27FC236}">
+                <a16:creationId xmlns:a16="http://schemas.microsoft.com/office/drawing/2014/main" id="{2E224E13-D7BE-6513-E504-619451B42EC9}"/>
+              </a:ext>
+            </a:extLst>
+          </p:cNvPr>
+          <p:cNvSpPr>
+            <a:spLocks noGrp="1"/>
+          </p:cNvSpPr>
+          <p:nvPr>
+            <p:ph type="sldNum" sz="quarter" idx="12"/>
+          </p:nvPr>
+        </p:nvSpPr>
+        <p:spPr/>
+        <p:txBody>
+          <a:bodyPr/>
+          <a:lstStyle/>
+          <a:p>
+            <a:fld id="{688E35B6-022C-7C4E-B7C3-0323E9902798}" type="slidenum">
+              <a:rPr lang="en-US" smtClean="0"/>
+              <a:t>10</a:t>
+            </a:fld>
+            <a:endParaRPr lang="en-US"/>
+          </a:p>
+        </p:txBody>
+      </p:sp>
+    </p:spTree>
+    <p:extLst>
+      <p:ext uri="{BB962C8B-B14F-4D97-AF65-F5344CB8AC3E}">
+        <p14:creationId xmlns:p14="http://schemas.microsoft.com/office/powerpoint/2010/main" val="4280311680"/>
+      </p:ext>
+    </p:extLst>
+  </p:cSld>
+  <p:clrMapOvr>
+    <a:masterClrMapping/>
+  </p:clrMapOvr>
+  <mc:AlternateContent xmlns:mc="http://schemas.openxmlformats.org/markup-compatibility/2006" xmlns:p14="http://schemas.microsoft.com/office/powerpoint/2010/main">
+    <mc:Choice Requires="p14">
+      <p:transition spd="slow" p14:dur="2000">
+        <p14:prism isContent="1"/>
+      </p:transition>
+    </mc:Choice>
+    <mc:Fallback xmlns="">
+      <p:transition spd="slow">
+        <p:fade/>
+      </p:transition>
+    </mc:Fallback>
+  </mc:AlternateContent>
+</p:sld>
+</file>
+
+<file path=ppt/slides/slide11.xml><?xml version="1.0" encoding="utf-8"?>
+<p:sld xmlns:a="http://schemas.openxmlformats.org/drawingml/2006/main" xmlns:r="http://schemas.openxmlformats.org/officeDocument/2006/relationships" xmlns:p="http://schemas.openxmlformats.org/presentationml/2006/main">
+  <p:cSld>
+    <p:spTree>
+      <p:nvGrpSpPr>
+        <p:cNvPr id="1" name=""/>
+        <p:cNvGrpSpPr/>
+        <p:nvPr/>
+      </p:nvGrpSpPr>
+      <p:grpSpPr>
+        <a:xfrm>
+          <a:off x="0" y="0"/>
+          <a:ext cx="0" cy="0"/>
+          <a:chOff x="0" y="0"/>
+          <a:chExt cx="0" cy="0"/>
+        </a:xfrm>
+      </p:grpSpPr>
+      <p:sp>
+        <p:nvSpPr>
+          <p:cNvPr id="2" name="Title 1">
+            <a:extLst>
+              <a:ext uri="{FF2B5EF4-FFF2-40B4-BE49-F238E27FC236}">
+                <a16:creationId xmlns:a16="http://schemas.microsoft.com/office/drawing/2014/main" id="{666666A5-2A0A-49B2-7BFA-039F18FC6C91}"/>
+              </a:ext>
+            </a:extLst>
+          </p:cNvPr>
+          <p:cNvSpPr>
+            <a:spLocks noGrp="1"/>
+          </p:cNvSpPr>
+          <p:nvPr>
+            <p:ph type="title"/>
+          </p:nvPr>
+        </p:nvSpPr>
+        <p:spPr/>
+        <p:txBody>
+          <a:bodyPr>
+            <a:normAutofit fontScale="90000"/>
+          </a:bodyPr>
+          <a:lstStyle/>
+          <a:p>
+            <a:r>
+              <a:rPr lang="en-US" dirty="0"/>
+              <a:t>Todo TUI</a:t>
+            </a:r>
+          </a:p>
+        </p:txBody>
+      </p:sp>
+      <p:sp>
+        <p:nvSpPr>
+          <p:cNvPr id="3" name="Content Placeholder 2">
+            <a:extLst>
+              <a:ext uri="{FF2B5EF4-FFF2-40B4-BE49-F238E27FC236}">
+                <a16:creationId xmlns:a16="http://schemas.microsoft.com/office/drawing/2014/main" id="{0BF6D1A9-0C66-95E8-5B28-C5DFD1B0BC59}"/>
+              </a:ext>
+            </a:extLst>
+          </p:cNvPr>
+          <p:cNvSpPr>
+            <a:spLocks noGrp="1"/>
+          </p:cNvSpPr>
+          <p:nvPr>
+            <p:ph idx="1"/>
+          </p:nvPr>
+        </p:nvSpPr>
+        <p:spPr/>
+        <p:txBody>
+          <a:bodyPr/>
+          <a:lstStyle/>
+          <a:p>
+            <a:r>
+              <a:rPr lang="en-US" dirty="0">
+                <a:hlinkClick r:id="rId2"/>
+              </a:rPr>
+              <a:t>https://github.com/drb80/TodoTUI</a:t>
+            </a:r>
+            <a:endParaRPr lang="en-US" dirty="0"/>
+          </a:p>
+        </p:txBody>
+      </p:sp>
+      <p:sp>
+        <p:nvSpPr>
+          <p:cNvPr id="4" name="Date Placeholder 3">
+            <a:extLst>
+              <a:ext uri="{FF2B5EF4-FFF2-40B4-BE49-F238E27FC236}">
+                <a16:creationId xmlns:a16="http://schemas.microsoft.com/office/drawing/2014/main" id="{513A58FF-9F4B-E1DB-2BE5-3FEA16EBA80E}"/>
+              </a:ext>
+            </a:extLst>
+          </p:cNvPr>
+          <p:cNvSpPr>
+            <a:spLocks noGrp="1"/>
+          </p:cNvSpPr>
+          <p:nvPr>
+            <p:ph type="dt" sz="half" idx="10"/>
+          </p:nvPr>
+        </p:nvSpPr>
+        <p:spPr/>
+        <p:txBody>
+          <a:bodyPr/>
+          <a:lstStyle/>
+          <a:p>
+            <a:fld id="{FD0A75D3-C541-3540-8222-7C4B35444F23}" type="datetime1">
+              <a:rPr lang="en-US" smtClean="0"/>
+              <a:t>10/27/26</a:t>
+            </a:fld>
+            <a:endParaRPr lang="en-US"/>
+          </a:p>
+        </p:txBody>
+      </p:sp>
+      <p:sp>
+        <p:nvSpPr>
+          <p:cNvPr id="5" name="Footer Placeholder 4">
+            <a:extLst>
+              <a:ext uri="{FF2B5EF4-FFF2-40B4-BE49-F238E27FC236}">
+                <a16:creationId xmlns:a16="http://schemas.microsoft.com/office/drawing/2014/main" id="{4897E87A-42E6-B12C-7F5B-356129F03BAE}"/>
+              </a:ext>
+            </a:extLst>
+          </p:cNvPr>
+          <p:cNvSpPr>
+            <a:spLocks noGrp="1"/>
+          </p:cNvSpPr>
+          <p:nvPr>
+            <p:ph type="ftr" sz="quarter" idx="11"/>
+          </p:nvPr>
+        </p:nvSpPr>
+        <p:spPr/>
+        <p:txBody>
+          <a:bodyPr/>
+          <a:lstStyle/>
+          <a:p>
+            <a:r>
+              <a:rPr lang="en-US"/>
+              <a:t>© Steve Beaty and others as cited</a:t>
+            </a:r>
+          </a:p>
+        </p:txBody>
+      </p:sp>
+      <p:sp>
+        <p:nvSpPr>
+          <p:cNvPr id="6" name="Slide Number Placeholder 5">
+            <a:extLst>
+              <a:ext uri="{FF2B5EF4-FFF2-40B4-BE49-F238E27FC236}">
+                <a16:creationId xmlns:a16="http://schemas.microsoft.com/office/drawing/2014/main" id="{0618FEA0-DD41-1A4B-1CAA-F2223FCCAEA0}"/>
+              </a:ext>
+            </a:extLst>
+          </p:cNvPr>
+          <p:cNvSpPr>
+            <a:spLocks noGrp="1"/>
+          </p:cNvSpPr>
+          <p:nvPr>
+            <p:ph type="sldNum" sz="quarter" idx="12"/>
+          </p:nvPr>
+        </p:nvSpPr>
+        <p:spPr/>
+        <p:txBody>
+          <a:bodyPr/>
+          <a:lstStyle/>
+          <a:p>
+            <a:fld id="{688E35B6-022C-7C4E-B7C3-0323E9902798}" type="slidenum">
+              <a:rPr lang="en-US" smtClean="0"/>
+              <a:t>11</a:t>
+            </a:fld>
+            <a:endParaRPr lang="en-US"/>
+          </a:p>
+        </p:txBody>
+      </p:sp>
+    </p:spTree>
+    <p:extLst>
+      <p:ext uri="{BB962C8B-B14F-4D97-AF65-F5344CB8AC3E}">
+        <p14:creationId xmlns:p14="http://schemas.microsoft.com/office/powerpoint/2010/main" val="3914028797"/>
+      </p:ext>
+    </p:extLst>
+  </p:cSld>
+  <p:clrMapOvr>
+    <a:masterClrMapping/>
+  </p:clrMapOvr>
+  <mc:AlternateContent xmlns:mc="http://schemas.openxmlformats.org/markup-compatibility/2006" xmlns:p14="http://schemas.microsoft.com/office/powerpoint/2010/main">
+    <mc:Choice Requires="p14">
+      <p:transition spd="slow" p14:dur="2000">
+        <p14:prism isContent="1"/>
+      </p:transition>
+    </mc:Choice>
+    <mc:Fallback xmlns="">
+      <p:transition spd="slow">
+        <p:fade/>
+      </p:transition>
+    </mc:Fallback>
+  </mc:AlternateContent>
+</p:sld>
+</file>
+
 <file path=ppt/slides/slide2.xml><?xml version="1.0" encoding="utf-8"?>
 <p:sld xmlns:a="http://schemas.openxmlformats.org/drawingml/2006/main" xmlns:r="http://schemas.openxmlformats.org/officeDocument/2006/relationships" xmlns:p="http://schemas.openxmlformats.org/presentationml/2006/main">
   <p:cSld>
@@ -4946,7 +5387,7 @@
           <p:cNvPr id="2" name="Title 1">
             <a:extLst>
               <a:ext uri="{FF2B5EF4-FFF2-40B4-BE49-F238E27FC236}">
-                <a16:creationId xmlns:a16="http://schemas.microsoft.com/office/drawing/2014/main" id="{18186E39-D31F-7B26-00DC-DD5446EFD4D8}"/>
+                <a16:creationId xmlns:a16="http://schemas.microsoft.com/office/drawing/2014/main" id="{E41AEB5C-E4EB-00EA-A7C6-2C16C99FBAF1}"/>
               </a:ext>
             </a:extLst>
           </p:cNvPr>
@@ -4965,8 +5406,38 @@
           <a:lstStyle/>
           <a:p>
             <a:r>
-              <a:rPr lang="en-US" dirty="0" err="1"/>
-              <a:t>Howto</a:t>
+              <a:rPr lang="en-US" dirty="0"/>
+              <a:t>Example Repo</a:t>
+            </a:r>
+          </a:p>
+        </p:txBody>
+      </p:sp>
+      <p:sp>
+        <p:nvSpPr>
+          <p:cNvPr id="3" name="Content Placeholder 2">
+            <a:extLst>
+              <a:ext uri="{FF2B5EF4-FFF2-40B4-BE49-F238E27FC236}">
+                <a16:creationId xmlns:a16="http://schemas.microsoft.com/office/drawing/2014/main" id="{980F565B-8181-9213-24F9-D6C367B634E3}"/>
+              </a:ext>
+            </a:extLst>
+          </p:cNvPr>
+          <p:cNvSpPr>
+            <a:spLocks noGrp="1"/>
+          </p:cNvSpPr>
+          <p:nvPr>
+            <p:ph idx="1"/>
+          </p:nvPr>
+        </p:nvSpPr>
+        <p:spPr/>
+        <p:txBody>
+          <a:bodyPr/>
+          <a:lstStyle/>
+          <a:p>
+            <a:r>
+              <a:rPr lang="en-US" dirty="0">
+                <a:hlinkClick r:id="rId2"/>
+              </a:rPr>
+              <a:t>https://github.com/drb80/InkTUI</a:t>
             </a:r>
             <a:endParaRPr lang="en-US" dirty="0"/>
           </a:p>
@@ -4974,101 +5445,10 @@
       </p:sp>
       <p:sp>
         <p:nvSpPr>
-          <p:cNvPr id="3" name="Content Placeholder 2">
-            <a:extLst>
-              <a:ext uri="{FF2B5EF4-FFF2-40B4-BE49-F238E27FC236}">
-                <a16:creationId xmlns:a16="http://schemas.microsoft.com/office/drawing/2014/main" id="{BA912E92-7534-64D3-13C0-9B4B1038EF7A}"/>
-              </a:ext>
-            </a:extLst>
-          </p:cNvPr>
-          <p:cNvSpPr>
-            <a:spLocks noGrp="1"/>
-          </p:cNvSpPr>
-          <p:nvPr>
-            <p:ph idx="1"/>
-          </p:nvPr>
-        </p:nvSpPr>
-        <p:spPr/>
-        <p:txBody>
-          <a:bodyPr/>
-          <a:lstStyle/>
-          <a:p>
-            <a:r>
-              <a:rPr lang="en-US" dirty="0" err="1"/>
-              <a:t>npm</a:t>
-            </a:r>
-            <a:r>
-              <a:rPr lang="en-US" dirty="0"/>
-              <a:t> </a:t>
-            </a:r>
-            <a:r>
-              <a:rPr lang="en-US" dirty="0" err="1"/>
-              <a:t>init</a:t>
-            </a:r>
-            <a:r>
-              <a:rPr lang="en-US" dirty="0"/>
-              <a:t> –y</a:t>
-            </a:r>
-          </a:p>
-          <a:p>
-            <a:r>
-              <a:rPr lang="en-US" dirty="0" err="1"/>
-              <a:t>npm</a:t>
-            </a:r>
-            <a:r>
-              <a:rPr lang="en-US" dirty="0"/>
-              <a:t> install ink react</a:t>
-            </a:r>
-          </a:p>
-          <a:p>
-            <a:r>
-              <a:rPr lang="en-US" dirty="0" err="1"/>
-              <a:t>npm</a:t>
-            </a:r>
-            <a:r>
-              <a:rPr lang="en-US" dirty="0"/>
-              <a:t> install -D </a:t>
-            </a:r>
-            <a:r>
-              <a:rPr lang="en-US" dirty="0" err="1"/>
-              <a:t>tsx</a:t>
-            </a:r>
-            <a:endParaRPr lang="en-US" dirty="0"/>
-          </a:p>
-          <a:p>
-            <a:r>
-              <a:rPr lang="en-US" dirty="0" err="1"/>
-              <a:t>npx</a:t>
-            </a:r>
-            <a:r>
-              <a:rPr lang="en-US" dirty="0"/>
-              <a:t> </a:t>
-            </a:r>
-            <a:r>
-              <a:rPr lang="en-US" dirty="0" err="1"/>
-              <a:t>tsx</a:t>
-            </a:r>
-            <a:r>
-              <a:rPr lang="en-US" dirty="0"/>
-              <a:t> </a:t>
-            </a:r>
-            <a:r>
-              <a:rPr lang="en-US" dirty="0" err="1"/>
-              <a:t>colors.jsx</a:t>
-            </a:r>
-            <a:endParaRPr lang="en-US" dirty="0"/>
-          </a:p>
-          <a:p>
-            <a:endParaRPr lang="en-US" dirty="0"/>
-          </a:p>
-        </p:txBody>
-      </p:sp>
-      <p:sp>
-        <p:nvSpPr>
           <p:cNvPr id="4" name="Date Placeholder 3">
             <a:extLst>
               <a:ext uri="{FF2B5EF4-FFF2-40B4-BE49-F238E27FC236}">
-                <a16:creationId xmlns:a16="http://schemas.microsoft.com/office/drawing/2014/main" id="{0E10CC22-5EB2-9E6C-EA7F-01E8DCB29781}"/>
+                <a16:creationId xmlns:a16="http://schemas.microsoft.com/office/drawing/2014/main" id="{0A771F0E-B423-7F3D-9DA6-8F364C4D8E17}"/>
               </a:ext>
             </a:extLst>
           </p:cNvPr>
@@ -5084,7 +5464,7 @@
           <a:bodyPr/>
           <a:lstStyle/>
           <a:p>
-            <a:fld id="{FA1778D9-0FEE-AE4E-9301-EC64BED65456}" type="datetime1">
+            <a:fld id="{9277C3D0-D02A-5345-8559-C06F19AD786E}" type="datetime1">
               <a:rPr lang="en-US" smtClean="0"/>
               <a:t>10/27/26</a:t>
             </a:fld>
@@ -5097,7 +5477,7 @@
           <p:cNvPr id="5" name="Footer Placeholder 4">
             <a:extLst>
               <a:ext uri="{FF2B5EF4-FFF2-40B4-BE49-F238E27FC236}">
-                <a16:creationId xmlns:a16="http://schemas.microsoft.com/office/drawing/2014/main" id="{3585ADD9-FCE7-8B1A-2589-BE4412627193}"/>
+                <a16:creationId xmlns:a16="http://schemas.microsoft.com/office/drawing/2014/main" id="{8F527A40-912C-97C3-60B4-68F3944C5D74}"/>
               </a:ext>
             </a:extLst>
           </p:cNvPr>
@@ -5125,7 +5505,7 @@
           <p:cNvPr id="6" name="Slide Number Placeholder 5">
             <a:extLst>
               <a:ext uri="{FF2B5EF4-FFF2-40B4-BE49-F238E27FC236}">
-                <a16:creationId xmlns:a16="http://schemas.microsoft.com/office/drawing/2014/main" id="{2E224E13-D7BE-6513-E504-619451B42EC9}"/>
+                <a16:creationId xmlns:a16="http://schemas.microsoft.com/office/drawing/2014/main" id="{0F263679-8C9E-F9EF-BA8E-D5685E6EF310}"/>
               </a:ext>
             </a:extLst>
           </p:cNvPr>
@@ -5152,7 +5532,7 @@
     </p:spTree>
     <p:extLst>
       <p:ext uri="{BB962C8B-B14F-4D97-AF65-F5344CB8AC3E}">
-        <p14:creationId xmlns:p14="http://schemas.microsoft.com/office/powerpoint/2010/main" val="4280311680"/>
+        <p14:creationId xmlns:p14="http://schemas.microsoft.com/office/powerpoint/2010/main" val="389411064"/>
       </p:ext>
     </p:extLst>
   </p:cSld>
